--- a/week-03/presentations/ppts/day-02-acceptance-criteria.pptx
+++ b/week-03/presentations/ppts/day-02-acceptance-criteria.pptx
@@ -546,7 +546,7 @@
             </a:pPr>
             <a:r>
               <a:rPr/>
-              <a:t>Reminder up front: still non-AI. Today produces §6 of the PRD. AC are where most PRDs fail when reviewed by engineers.</a:t>
+              <a:t>Reminder up front: still non-AI. Today produces Section 6 of the PRD. AC are where most PRDs fail when reviewed by engineers.</a:t>
             </a:r>
           </a:p>
         </p:txBody>
@@ -1448,7 +1448,7 @@
             </a:pPr>
             <a:r>
               <a:rPr/>
-              <a:t>By 16:00, every triad’s PRD §6 has 8–12 ACs covering all three paths. Review-resolution note is the trust artifact.</a:t>
+              <a:t>By 16:00, every triad’s PRD Section 6 has 8–12 ACs covering all three paths. Review-resolution note is the trust artifact.</a:t>
             </a:r>
           </a:p>
         </p:txBody>
@@ -1776,7 +1776,7 @@
             </a:pPr>
             <a:r>
               <a:rPr/>
-              <a:t>Arc: calibrate → happy → sad/weird → cross-review. Each block fills one part of §6.</a:t>
+              <a:t>Arc: calibrate → happy → sad/weird → cross-review. Each block fills one part of Section 6.</a:t>
             </a:r>
           </a:p>
         </p:txBody>
@@ -5629,7 +5629,7 @@
             </a:pPr>
             <a:r>
               <a:rPr/>
-              <a:t>Identify the happy path from your §5. Each member solo-drafts 3 AC. Pool, de-dupe, refine to 3–5 final.</a:t>
+              <a:t>Identify the happy path from your Section 5. Each member solo-drafts 3 AC. Pool, de-dupe, refine to 3–5 final.</a:t>
             </a:r>
           </a:p>
           <a:p>
@@ -6358,7 +6358,7 @@
             </a:pPr>
             <a:r>
               <a:rPr/>
-              <a:t>Swap PRDs (reviewer reads §§1–5 first for context, then §6)</a:t>
+              <a:t>Swap PRDs (reviewer reads Sections 1–5 first for context, then Section 6)</a:t>
             </a:r>
           </a:p>
           <a:p>
@@ -6541,7 +6541,7 @@
             </a:pPr>
             <a:r>
               <a:rPr/>
-              <a:t>At the bottom of §6, document what changed and why:</a:t>
+              <a:t>At the bottom of Section 6, document what changed and why:</a:t>
             </a:r>
           </a:p>
         </p:txBody>
@@ -6634,16 +6634,16 @@
             </a:pPr>
             <a:r>
               <a:rPr/>
-              <a:t>5 min: read their §§1–5</a:t>
-            </a:r>
-          </a:p>
-          <a:p>
-            <a:pPr lvl="0" indent="0" marL="0">
-              <a:buNone/>
-            </a:pPr>
-            <a:r>
-              <a:rPr/>
-              <a:t>15 min: review their §6 with the 5 failures + path coverage in mind</a:t>
+              <a:t>5 min: read their Sections 1–5</a:t>
+            </a:r>
+          </a:p>
+          <a:p>
+            <a:pPr lvl="0" indent="0" marL="0">
+              <a:buNone/>
+            </a:pPr>
+            <a:r>
+              <a:rPr/>
+              <a:t>15 min: review their Section 6 with the 5 failures + path coverage in mind</a:t>
             </a:r>
           </a:p>
           <a:p>
@@ -6823,7 +6823,7 @@
             </a:pPr>
             <a:r>
               <a:rPr/>
-              <a:t>Bring to Day 3: Your PRD with §§1–6 complete. NFRs come tomorrow.</a:t>
+              <a:t>Bring to Day 3: Your PRD with Sections 1–6 complete. NFRs come tomorrow.</a:t>
             </a:r>
           </a:p>
         </p:txBody>

--- a/week-03/presentations/ppts/day-02-acceptance-criteria.pptx
+++ b/week-03/presentations/ppts/day-02-acceptance-criteria.pptx
@@ -6250,7 +6250,7 @@
             </a:pPr>
             <a:r>
               <a:rPr/>
-              <a:t>Friday’s review covers the whole PRD. Today’s review covers just AC. Two reasons:</a:t>
+              <a:t>Friday’s review covers the whole Product Requirements Document (PRD). Today’s review covers just AC. Two reasons:</a:t>
             </a:r>
           </a:p>
           <a:p>
@@ -6796,7 +6796,7 @@
             </a:pPr>
             <a:r>
               <a:rPr/>
-              <a:t>Non-Functional Requirements</a:t>
+              <a:t>Non-Functional Requirements (NFR)</a:t>
             </a:r>
           </a:p>
           <a:p>
@@ -6970,7 +6970,7 @@
             </a:pPr>
             <a:r>
               <a:rPr/>
-              <a:t>Write AC in Given/When/Then form — testable, falsifiable, scoped</a:t>
+              <a:t>Write acceptance criteria (AC) in Given/When/Then form — testable, falsifiable, scoped</a:t>
             </a:r>
           </a:p>
           <a:p>

--- a/week-03/presentations/ppts/day-02-acceptance-criteria.pptx
+++ b/week-03/presentations/ppts/day-02-acceptance-criteria.pptx
@@ -5540,6 +5540,21 @@
           <a:bodyPr/>
           <a:lstStyle/>
           <a:p>
+            <a:pPr lvl="0" indent="0">
+              <a:buNone/>
+            </a:pPr>
+            <a:r>
+              <a:rPr>
+                <a:latin typeface="Courier"/>
+              </a:rPr>
+              <a:t>Given a dispatcher viewing the end-of-shift summary
+When they tap "Reconcile all"
+Then the reconcile modal opens within 1 second
+and shows all open tickets pre-selected
+and the header shows the count of tickets selected</a:t>
+            </a:r>
+          </a:p>
+          <a:p>
             <a:pPr lvl="0" indent="0" marL="0">
               <a:buNone/>
             </a:pPr>
@@ -5860,6 +5875,20 @@
               <a:t>What if the data is missing or stale?</a:t>
             </a:r>
           </a:p>
+          <a:p>
+            <a:pPr lvl="0" indent="0">
+              <a:buNone/>
+            </a:pPr>
+            <a:r>
+              <a:rPr>
+                <a:latin typeface="Courier"/>
+              </a:rPr>
+              <a:t>Given a dispatcher with 0 open tickets
+When they tap "Reconcile all"
+Then a non-modal toast appears with text "No tickets to reconcile"
+and the dispatcher remains on the summary screen</a:t>
+            </a:r>
+          </a:p>
         </p:txBody>
       </p:sp>
     </p:spTree>
@@ -5977,6 +6006,21 @@
               <a:t>What if the user is at the boundary (max, min, empty)?</a:t>
             </a:r>
           </a:p>
+          <a:p>
+            <a:pPr lvl="0" indent="0">
+              <a:buNone/>
+            </a:pPr>
+            <a:r>
+              <a:rPr>
+                <a:latin typeface="Courier"/>
+              </a:rPr>
+              <a:t>Given a dispatcher with 47 open tickets (more than modal can list)
+When they tap "Reconcile all"
+Then the modal opens with the first 25 tickets pre-selected
+and a banner reads "22 more tickets — load more"
+and a tap on the banner appends the next 25 below</a:t>
+            </a:r>
+          </a:p>
         </p:txBody>
       </p:sp>
     </p:spTree>
@@ -6544,6 +6588,28 @@
               <a:t>At the bottom of Section 6, document what changed and why:</a:t>
             </a:r>
           </a:p>
+          <a:p>
+            <a:pPr lvl="0" indent="0">
+              <a:buNone/>
+            </a:pPr>
+            <a:r>
+              <a:rPr>
+                <a:latin typeface="Courier"/>
+              </a:rPr>
+              <a:t>## Review-resolution note (Day 2)
+**Reviewers:** Triad B
+**Findings:**
+1. AC #3 was vague ("loads fast") — REWROTE with explicit 1-sec target
+2. Missing weird-path AC for offline submit — ADDED as AC #11
+3. AC #7 was implementation-prescriptive — REWROTE in user terms
+**Deferred:**
+- Reviewer suggested AC for "user clicks back button" — DEFERRED to NFR
+discussion Day 3 (more about state preservation than acceptance)
+**Pushed back:**
+- Reviewer suggested splitting AC #2 — DECLINED. Original "and"
+describes one observable state, not multiple behaviors.</a:t>
+            </a:r>
+          </a:p>
         </p:txBody>
       </p:sp>
     </p:spTree>
@@ -7372,6 +7438,19 @@
         <p:txBody>
           <a:bodyPr/>
           <a:lstStyle/>
+          <a:p>
+            <a:pPr lvl="0" indent="0">
+              <a:buNone/>
+            </a:pPr>
+            <a:r>
+              <a:rPr>
+                <a:latin typeface="Courier"/>
+              </a:rPr>
+              <a:t>Given &lt;a precondition / starting state&gt;
+When &lt;an action or event happens&gt;
+Then &lt;an observable, falsifiable result&gt;</a:t>
+            </a:r>
+          </a:p>
           <a:p>
             <a:pPr lvl="0" indent="0" marL="0">
               <a:buNone/>

--- a/week-03/presentations/ppts/day-02-acceptance-criteria.pptx
+++ b/week-03/presentations/ppts/day-02-acceptance-criteria.pptx
@@ -792,7 +792,7 @@
             </a:pPr>
             <a:r>
               <a:rPr/>
-              <a:t>Sad and weird paths are where most PRDs break down in engineering review. Push triads to generate exhaustively, then cull — under-coverage here is the most common Friday finding.</a:t>
+              <a:t>Sad and weird paths are where most PRDs break down in engineering review. Push quads to generate exhaustively, then cull — under-coverage here is the most common Friday finding.</a:t>
             </a:r>
           </a:p>
         </p:txBody>
@@ -1038,7 +1038,7 @@
             </a:pPr>
             <a:r>
               <a:rPr/>
-              <a:t>If a triad finishes early, push them to add a third weird-path AC. There’s always more.</a:t>
+              <a:t>If a quad finishes early, push them to add a third weird-path AC. There’s always more.</a:t>
             </a:r>
           </a:p>
         </p:txBody>
@@ -1120,7 +1120,7 @@
             </a:pPr>
             <a:r>
               <a:rPr/>
-              <a:t>Cross-review mid-week beats discovering AC weakness on Friday. Triads who read each other’s AC carry a sharper standard back to their own PRD.</a:t>
+              <a:t>Cross-review mid-week beats discovering AC weakness on Friday. Quads who read each other’s AC carry a sharper standard back to their own PRD.</a:t>
             </a:r>
           </a:p>
         </p:txBody>
@@ -1366,7 +1366,7 @@
             </a:pPr>
             <a:r>
               <a:rPr/>
-              <a:t>The “pushed back” entries are the trust signal. They show the author triad thought, not just complied.</a:t>
+              <a:t>The “pushed back” entries are the trust signal. They show the author quad thought, not just complied.</a:t>
             </a:r>
           </a:p>
         </p:txBody>
@@ -1448,7 +1448,7 @@
             </a:pPr>
             <a:r>
               <a:rPr/>
-              <a:t>By 16:00, every triad’s PRD Section 6 has 8–12 ACs covering all three paths. Review-resolution note is the trust artifact.</a:t>
+              <a:t>By 16:00, every quad’s PRD Section 6 has 8–12 ACs covering all three paths. Review-resolution note is the trust artifact.</a:t>
             </a:r>
           </a:p>
         </p:txBody>
@@ -1530,7 +1530,7 @@
             </a:pPr>
             <a:r>
               <a:rPr/>
-              <a:t>Wrap-share: each triad reads aloud one AC they’re proudest of and one they’re least sure about. The “least sure” is the calibration.</a:t>
+              <a:t>Wrap-share: each quad reads aloud one AC they’re proudest of and one they’re least sure about. The “least sure” is the calibration.</a:t>
             </a:r>
           </a:p>
         </p:txBody>
@@ -1858,7 +1858,7 @@
             </a:pPr>
             <a:r>
               <a:rPr/>
-              <a:t>Block 1 calibrates the eye. Walk triads through the five failure modes before they write — recognizing bad AC is the prerequisite to writing good ones.</a:t>
+              <a:t>Block 1 calibrates the eye. Walk quads through the five failure modes before they write — recognizing bad AC is the prerequisite to writing good ones.</a:t>
             </a:r>
           </a:p>
         </p:txBody>
@@ -2104,7 +2104,7 @@
             </a:pPr>
             <a:r>
               <a:rPr/>
-              <a:t>Walk the room — triads will over-confidently call some failures “clean.” Use those for shared learning.</a:t>
+              <a:t>Walk the room — quads will over-confidently call some failures “clean.” Use those for shared learning.</a:t>
             </a:r>
           </a:p>
         </p:txBody>
@@ -2186,7 +2186,7 @@
             </a:pPr>
             <a:r>
               <a:rPr/>
-              <a:t>Happy-path AC are the cheapest to write — start here so triads build momentum and have raw material for the sad/weird paths in Block 3.</a:t>
+              <a:t>Happy-path AC are the cheapest to write — start here so quads build momentum and have raw material for the sad/weird paths in Block 3.</a:t>
             </a:r>
           </a:p>
         </p:txBody>
@@ -2268,7 +2268,7 @@
             </a:pPr>
             <a:r>
               <a:rPr/>
-              <a:t>Aim for 8–12 AC total with this distribution. Triads who write only happy-path AC get docked Friday.</a:t>
+              <a:t>Aim for 8–12 AC total with this distribution. Quads who write only happy-path AC get docked Friday.</a:t>
             </a:r>
           </a:p>
         </p:txBody>
@@ -5635,7 +5635,7 @@
             </a:pPr>
             <a:r>
               <a:rPr b="1"/>
-              <a:t>Triads • 40 minutes</a:t>
+              <a:t>Quads • 40 minutes</a:t>
             </a:r>
           </a:p>
           <a:p>
@@ -6093,7 +6093,7 @@
             </a:pPr>
             <a:r>
               <a:rPr b="1"/>
-              <a:t>Triads • 40 minutes</a:t>
+              <a:t>Quads • 40 minutes</a:t>
             </a:r>
           </a:p>
           <a:p>
@@ -6222,7 +6222,7 @@
             </a:pPr>
             <a:r>
               <a:rPr b="1"/>
-              <a:t>Apply the calibrated eye to another triad’s AC</a:t>
+              <a:t>Apply the calibrated eye to another quad’s AC</a:t>
             </a:r>
           </a:p>
         </p:txBody>
@@ -6393,7 +6393,7 @@
             </a:pPr>
             <a:r>
               <a:rPr/>
-              <a:t>Pair triads (instructor assigns)</a:t>
+              <a:t>Pair quads (instructor assigns)</a:t>
             </a:r>
           </a:p>
           <a:p>
@@ -6420,7 +6420,7 @@
             </a:pPr>
             <a:r>
               <a:rPr/>
-              <a:t>Author triad responds: adopt / defer / push back, with reasoning</a:t>
+              <a:t>Author quad responds: adopt / defer / push back, with reasoning</a:t>
             </a:r>
           </a:p>
           <a:p>
@@ -6597,7 +6597,7 @@
                 <a:latin typeface="Courier"/>
               </a:rPr>
               <a:t>## Review-resolution note (Day 2)
-**Reviewers:** Triad B
+**Reviewers:** Quad B
 **Findings:**
 1. AC #3 was vague ("loads fast") — REWROTE with explicit 1-sec target
 2. Missing weird-path AC for offline submit — ADDED as AC #11
@@ -6682,16 +6682,16 @@
             </a:pPr>
             <a:r>
               <a:rPr b="1"/>
-              <a:t>Triad pairs • 45 minutes • Wrap</a:t>
-            </a:r>
-          </a:p>
-          <a:p>
-            <a:pPr lvl="0" indent="0" marL="0">
-              <a:buNone/>
-            </a:pPr>
-            <a:r>
-              <a:rPr/>
-              <a:t>Pair with another triad. Swap PRDs. Review their AC. Author triad responds. Revise and write the resolution note.</a:t>
+              <a:t>Quad pairs • 45 minutes • Wrap</a:t>
+            </a:r>
+          </a:p>
+          <a:p>
+            <a:pPr lvl="0" indent="0" marL="0">
+              <a:buNone/>
+            </a:pPr>
+            <a:r>
+              <a:rPr/>
+              <a:t>Pair with another quad. Swap PRDs. Review their AC. Author quad responds. Revise and write the resolution note.</a:t>
             </a:r>
           </a:p>
           <a:p>
@@ -6718,7 +6718,7 @@
             </a:pPr>
             <a:r>
               <a:rPr/>
-              <a:t>10 min: author triad responds</a:t>
+              <a:t>10 min: author quad responds</a:t>
             </a:r>
           </a:p>
           <a:p>
@@ -7063,7 +7063,7 @@
             </a:pPr>
             <a:r>
               <a:rPr/>
-              <a:t>Conduct an AC cross-review with another triad</a:t>
+              <a:t>Conduct an AC cross-review with another quad</a:t>
             </a:r>
           </a:p>
           <a:p>
@@ -7838,7 +7838,7 @@
             </a:pPr>
             <a:r>
               <a:rPr b="1"/>
-              <a:t>Triads • 35 minutes</a:t>
+              <a:t>Quads • 35 minutes</a:t>
             </a:r>
           </a:p>
           <a:p>

--- a/week-03/presentations/ppts/day-02-acceptance-criteria.pptx
+++ b/week-03/presentations/ppts/day-02-acceptance-criteria.pptx
@@ -5635,7 +5635,7 @@
             </a:pPr>
             <a:r>
               <a:rPr b="1"/>
-              <a:t>Quads • 40 minutes</a:t>
+              <a:t>Quads • 50 minutes</a:t>
             </a:r>
           </a:p>
           <a:p>
@@ -6093,7 +6093,7 @@
             </a:pPr>
             <a:r>
               <a:rPr b="1"/>
-              <a:t>Quads • 40 minutes</a:t>
+              <a:t>Quads • 50 minutes</a:t>
             </a:r>
           </a:p>
           <a:p>
@@ -6682,7 +6682,7 @@
             </a:pPr>
             <a:r>
               <a:rPr b="1"/>
-              <a:t>Quad pairs • 45 minutes • Wrap</a:t>
+              <a:t>Quad pairs • 55 minutes • Wrap</a:t>
             </a:r>
           </a:p>
           <a:p>
@@ -7838,7 +7838,7 @@
             </a:pPr>
             <a:r>
               <a:rPr b="1"/>
-              <a:t>Quads • 35 minutes</a:t>
+              <a:t>Quads • 45 minutes</a:t>
             </a:r>
           </a:p>
           <a:p>

--- a/week-03/presentations/ppts/day-02-acceptance-criteria.pptx
+++ b/week-03/presentations/ppts/day-02-acceptance-criteria.pptx
@@ -5662,7 +5662,7 @@
             </a:pPr>
             <a:r>
               <a:rPr/>
-              <a:t>15 min: solo drafts (3 each)</a:t>
+              <a:t>25 min: solo drafts (3 each)</a:t>
             </a:r>
           </a:p>
           <a:p>
@@ -5689,7 +5689,7 @@
             </a:pPr>
             <a:r>
               <a:rPr/>
-              <a:t>⏱ 5 + 15 + 15 + 5</a:t>
+              <a:t>⏱ 5 + 25 + 15 + 5</a:t>
             </a:r>
           </a:p>
         </p:txBody>
@@ -6111,7 +6111,7 @@
             </a:pPr>
             <a:r>
               <a:rPr/>
-              <a:t>10 min: solo sad-path drafts</a:t>
+              <a:t>20 min: solo sad-path drafts</a:t>
             </a:r>
           </a:p>
           <a:p>
@@ -6147,7 +6147,7 @@
             </a:pPr>
             <a:r>
               <a:rPr/>
-              <a:t>⏱ 10 + 10 + 10 + 10</a:t>
+              <a:t>⏱ 20 + 10 + 10 + 10</a:t>
             </a:r>
           </a:p>
         </p:txBody>
@@ -6709,7 +6709,7 @@
             </a:pPr>
             <a:r>
               <a:rPr/>
-              <a:t>15 min: review their Section 6 with the 5 failures + path coverage in mind</a:t>
+              <a:t>25 min: review their Section 6 with the 5 failures + path coverage in mind</a:t>
             </a:r>
           </a:p>
           <a:p>
@@ -6736,7 +6736,7 @@
             </a:pPr>
             <a:r>
               <a:rPr/>
-              <a:t>⏱ 5 + 15 + 10 + 15 · 15-min wrap</a:t>
+              <a:t>⏱ 5 + 25 + 10 + 15 · 15-min wrap</a:t>
             </a:r>
           </a:p>
         </p:txBody>
@@ -7856,7 +7856,7 @@
             </a:pPr>
             <a:r>
               <a:rPr/>
-              <a:t>20 min: triage all 12</a:t>
+              <a:t>30 min: triage all 12</a:t>
             </a:r>
           </a:p>
           <a:p>
